--- a/slides/final.pptx
+++ b/slides/final.pptx
@@ -3720,7 +3720,37 @@
               </a:defRPr>
             </a:pPr>
             <a:r>
-              <a:t>• Run eval.run_all + ml/eval/plots.py to populate real numbers and figures.</a:t>
+              <a:t>• Evaluated on a held-out per-user test split (test size = 18).</a:t>
+            </a:r>
+          </a:p>
+          <a:p>
+            <a:pPr>
+              <a:spcAft>
+                <a:spcPts val="600"/>
+              </a:spcAft>
+              <a:defRPr sz="1600">
+                <a:solidFill>
+                  <a:srgbClr val="10243E"/>
+                </a:solidFill>
+              </a:defRPr>
+            </a:pPr>
+            <a:r>
+              <a:t>• Off-the-shelf baselines — zero-shot indist. 42%, few-shot 53% (closer to 50% = better).</a:t>
+            </a:r>
+          </a:p>
+          <a:p>
+            <a:pPr>
+              <a:spcAft>
+                <a:spcPts val="600"/>
+              </a:spcAft>
+              <a:defRPr sz="1600">
+                <a:solidFill>
+                  <a:srgbClr val="10243E"/>
+                </a:solidFill>
+              </a:defRPr>
+            </a:pPr>
+            <a:r>
+              <a:t>• fine_tuned column is filled after the QLoRA GPU run (Modal/RunPod) — the core comparison.</a:t>
             </a:r>
           </a:p>
         </p:txBody>
@@ -3852,7 +3882,7 @@
                         <a:defRPr sz="1100"/>
                       </a:pPr>
                       <a:r>
-                        <a:t>pending</a:t>
+                        <a:t>41.7%</a:t>
                       </a:r>
                     </a:p>
                   </a:txBody>
@@ -3867,7 +3897,7 @@
                         <a:defRPr sz="1100"/>
                       </a:pPr>
                       <a:r>
-                        <a:t>pending</a:t>
+                        <a:t>[27,58]%</a:t>
                       </a:r>
                     </a:p>
                   </a:txBody>
@@ -3882,7 +3912,7 @@
                         <a:defRPr sz="1100"/>
                       </a:pPr>
                       <a:r>
-                        <a:t>pending</a:t>
+                        <a:t>0.905</a:t>
                       </a:r>
                     </a:p>
                   </a:txBody>
@@ -3892,7 +3922,14 @@
                   <a:txBody>
                     <a:bodyPr/>
                     <a:lstStyle/>
-                    <a:p/>
+                    <a:p>
+                      <a:pPr>
+                        <a:defRPr sz="1100"/>
+                      </a:pPr>
+                      <a:r>
+                        <a:t>3.39</a:t>
+                      </a:r>
+                    </a:p>
                   </a:txBody>
                   <a:tcPr/>
                 </a:tc>
@@ -3922,7 +3959,7 @@
                         <a:defRPr sz="1100"/>
                       </a:pPr>
                       <a:r>
-                        <a:t>pending</a:t>
+                        <a:t>52.8%</a:t>
                       </a:r>
                     </a:p>
                   </a:txBody>
@@ -3937,7 +3974,7 @@
                         <a:defRPr sz="1100"/>
                       </a:pPr>
                       <a:r>
-                        <a:t>pending</a:t>
+                        <a:t>[37,68]%</a:t>
                       </a:r>
                     </a:p>
                   </a:txBody>
@@ -3952,7 +3989,7 @@
                         <a:defRPr sz="1100"/>
                       </a:pPr>
                       <a:r>
-                        <a:t>pending</a:t>
+                        <a:t>0.902</a:t>
                       </a:r>
                     </a:p>
                   </a:txBody>
@@ -3962,7 +3999,14 @@
                   <a:txBody>
                     <a:bodyPr/>
                     <a:lstStyle/>
-                    <a:p/>
+                    <a:p>
+                      <a:pPr>
+                        <a:defRPr sz="1100"/>
+                      </a:pPr>
+                      <a:r>
+                        <a:t>3.56</a:t>
+                      </a:r>
+                    </a:p>
                   </a:txBody>
                   <a:tcPr/>
                 </a:tc>
@@ -3992,7 +4036,7 @@
                         <a:defRPr sz="1100"/>
                       </a:pPr>
                       <a:r>
-                        <a:t>GPU run</a:t>
+                        <a:t>pending (GPU)</a:t>
                       </a:r>
                     </a:p>
                   </a:txBody>
@@ -4032,7 +4076,14 @@
                   <a:txBody>
                     <a:bodyPr/>
                     <a:lstStyle/>
-                    <a:p/>
+                    <a:p>
+                      <a:pPr>
+                        <a:defRPr sz="1100"/>
+                      </a:pPr>
+                      <a:r>
+                        <a:t>—</a:t>
+                      </a:r>
+                    </a:p>
                   </a:txBody>
                   <a:tcPr/>
                 </a:tc>
@@ -4041,9 +4092,33 @@
           </a:graphicData>
         </a:graphic>
       </p:graphicFrame>
-      <p:sp>
-        <p:nvSpPr>
-          <p:cNvPr id="5" name="TextBox 4"/>
+      <p:pic>
+        <p:nvPicPr>
+          <p:cNvPr id="5" name="Picture 4" descr="indist_accuracy.png"/>
+          <p:cNvPicPr>
+            <a:picLocks noChangeAspect="1"/>
+          </p:cNvPicPr>
+          <p:nvPr/>
+        </p:nvPicPr>
+        <p:blipFill>
+          <a:blip r:embed="rId2"/>
+          <a:stretch>
+            <a:fillRect/>
+          </a:stretch>
+        </p:blipFill>
+        <p:spPr>
+          <a:xfrm>
+            <a:off x="6858000" y="1280160"/>
+            <a:ext cx="4937760" cy="3174274"/>
+          </a:xfrm>
+          <a:prstGeom prst="rect">
+            <a:avLst/>
+          </a:prstGeom>
+        </p:spPr>
+      </p:pic>
+      <p:sp>
+        <p:nvSpPr>
+          <p:cNvPr id="6" name="TextBox 5"/>
           <p:cNvSpPr txBox="1"/>
           <p:nvPr/>
         </p:nvSpPr>
